--- a/catalog/samples/pillars_foundation.pptx
+++ b/catalog/samples/pillars_foundation.pptx
@@ -972,7 +972,7 @@
           </a:p>
           <a:p>
             <a:r>
-              <a:t>  "template_sha256": "5fcb51e13225a5e0907048184be419bc2e0de6d09e0e6840257eb4243b158b32"</a:t>
+              <a:t>  "template_sha256": "877851eee5ebf9e1946012b52ea7f4c47f173e1ed3c33a87868fafc180321b44"</a:t>
             </a:r>
           </a:p>
           <a:p>
